--- a/Shapiro 2025 Project/Weekly Updates/Week 9 Updates.pptx
+++ b/Shapiro 2025 Project/Weekly Updates/Week 9 Updates.pptx
@@ -9,21 +9,21 @@
   </p:notesMasterIdLst>
   <p:sldIdLst>
     <p:sldId id="264" r:id="rId2"/>
-    <p:sldId id="371" r:id="rId3"/>
-    <p:sldId id="372" r:id="rId4"/>
-    <p:sldId id="375" r:id="rId5"/>
-    <p:sldId id="380" r:id="rId6"/>
-    <p:sldId id="376" r:id="rId7"/>
-    <p:sldId id="381" r:id="rId8"/>
-    <p:sldId id="377" r:id="rId9"/>
-    <p:sldId id="378" r:id="rId10"/>
-    <p:sldId id="379" r:id="rId11"/>
-    <p:sldId id="382" r:id="rId12"/>
-    <p:sldId id="384" r:id="rId13"/>
-    <p:sldId id="383" r:id="rId14"/>
-    <p:sldId id="267" r:id="rId15"/>
-    <p:sldId id="374" r:id="rId16"/>
-    <p:sldId id="385" r:id="rId17"/>
+    <p:sldId id="362" r:id="rId3"/>
+    <p:sldId id="371" r:id="rId4"/>
+    <p:sldId id="372" r:id="rId5"/>
+    <p:sldId id="375" r:id="rId6"/>
+    <p:sldId id="380" r:id="rId7"/>
+    <p:sldId id="376" r:id="rId8"/>
+    <p:sldId id="381" r:id="rId9"/>
+    <p:sldId id="377" r:id="rId10"/>
+    <p:sldId id="378" r:id="rId11"/>
+    <p:sldId id="379" r:id="rId12"/>
+    <p:sldId id="382" r:id="rId13"/>
+    <p:sldId id="384" r:id="rId14"/>
+    <p:sldId id="383" r:id="rId15"/>
+    <p:sldId id="386" r:id="rId16"/>
+    <p:sldId id="267" r:id="rId17"/>
   </p:sldIdLst>
   <p:sldSz cx="12192000" cy="6858000"/>
   <p:notesSz cx="6858000" cy="9144000"/>
@@ -571,6 +571,114 @@
         <p:cNvPr id="1" name="">
           <a:extLst>
             <a:ext uri="{FF2B5EF4-FFF2-40B4-BE49-F238E27FC236}">
+              <a16:creationId xmlns:a16="http://schemas.microsoft.com/office/drawing/2014/main" id="{78742C8A-26A4-7483-62E8-904951EA9597}"/>
+            </a:ext>
+          </a:extLst>
+        </p:cNvPr>
+        <p:cNvGrpSpPr/>
+        <p:nvPr/>
+      </p:nvGrpSpPr>
+      <p:grpSpPr>
+        <a:xfrm>
+          <a:off x="0" y="0"/>
+          <a:ext cx="0" cy="0"/>
+          <a:chOff x="0" y="0"/>
+          <a:chExt cx="0" cy="0"/>
+        </a:xfrm>
+      </p:grpSpPr>
+      <p:sp>
+        <p:nvSpPr>
+          <p:cNvPr id="2" name="Slide Image Placeholder 1">
+            <a:extLst>
+              <a:ext uri="{FF2B5EF4-FFF2-40B4-BE49-F238E27FC236}">
+                <a16:creationId xmlns:a16="http://schemas.microsoft.com/office/drawing/2014/main" id="{8673EE9D-6E90-6F07-1899-90C345C70F2F}"/>
+              </a:ext>
+            </a:extLst>
+          </p:cNvPr>
+          <p:cNvSpPr>
+            <a:spLocks noGrp="1" noRot="1" noChangeAspect="1"/>
+          </p:cNvSpPr>
+          <p:nvPr>
+            <p:ph type="sldImg"/>
+          </p:nvPr>
+        </p:nvSpPr>
+        <p:spPr/>
+      </p:sp>
+      <p:sp>
+        <p:nvSpPr>
+          <p:cNvPr id="3" name="Notes Placeholder 2">
+            <a:extLst>
+              <a:ext uri="{FF2B5EF4-FFF2-40B4-BE49-F238E27FC236}">
+                <a16:creationId xmlns:a16="http://schemas.microsoft.com/office/drawing/2014/main" id="{C4CF999A-DD2F-2E20-912A-159B97E77A5C}"/>
+              </a:ext>
+            </a:extLst>
+          </p:cNvPr>
+          <p:cNvSpPr>
+            <a:spLocks noGrp="1"/>
+          </p:cNvSpPr>
+          <p:nvPr>
+            <p:ph type="body" idx="1"/>
+          </p:nvPr>
+        </p:nvSpPr>
+        <p:spPr/>
+        <p:txBody>
+          <a:bodyPr/>
+          <a:lstStyle/>
+          <a:p>
+            <a:endParaRPr lang="en-US"/>
+          </a:p>
+        </p:txBody>
+      </p:sp>
+      <p:sp>
+        <p:nvSpPr>
+          <p:cNvPr id="4" name="Slide Number Placeholder 3">
+            <a:extLst>
+              <a:ext uri="{FF2B5EF4-FFF2-40B4-BE49-F238E27FC236}">
+                <a16:creationId xmlns:a16="http://schemas.microsoft.com/office/drawing/2014/main" id="{09350B96-A550-2069-FA53-BA6B4CCAEDA8}"/>
+              </a:ext>
+            </a:extLst>
+          </p:cNvPr>
+          <p:cNvSpPr>
+            <a:spLocks noGrp="1"/>
+          </p:cNvSpPr>
+          <p:nvPr>
+            <p:ph type="sldNum" sz="quarter" idx="5"/>
+          </p:nvPr>
+        </p:nvSpPr>
+        <p:spPr/>
+        <p:txBody>
+          <a:bodyPr/>
+          <a:lstStyle/>
+          <a:p>
+            <a:fld id="{58151AFC-CD2E-5241-A5F6-3092FE7745F8}" type="slidenum">
+              <a:rPr lang="en-US" smtClean="0"/>
+              <a:t>10</a:t>
+            </a:fld>
+            <a:endParaRPr lang="en-US"/>
+          </a:p>
+        </p:txBody>
+      </p:sp>
+    </p:spTree>
+    <p:extLst>
+      <p:ext uri="{BB962C8B-B14F-4D97-AF65-F5344CB8AC3E}">
+        <p14:creationId xmlns:p14="http://schemas.microsoft.com/office/powerpoint/2010/main" val="3103479242"/>
+      </p:ext>
+    </p:extLst>
+  </p:cSld>
+  <p:clrMapOvr>
+    <a:masterClrMapping/>
+  </p:clrMapOvr>
+</p:notes>
+</file>
+
+<file path=ppt/notesSlides/notesSlide11.xml><?xml version="1.0" encoding="utf-8"?>
+<p:notes xmlns:a="http://schemas.openxmlformats.org/drawingml/2006/main" xmlns:r="http://schemas.openxmlformats.org/officeDocument/2006/relationships" xmlns:p="http://schemas.openxmlformats.org/presentationml/2006/main">
+  <p:cSld>
+    <p:spTree>
+      <p:nvGrpSpPr>
+        <p:cNvPr id="1" name="">
+          <a:extLst>
+            <a:ext uri="{FF2B5EF4-FFF2-40B4-BE49-F238E27FC236}">
               <a16:creationId xmlns:a16="http://schemas.microsoft.com/office/drawing/2014/main" id="{15854D69-708C-6594-2725-BB574C98B028}"/>
             </a:ext>
           </a:extLst>
@@ -652,7 +760,7 @@
           <a:p>
             <a:fld id="{58151AFC-CD2E-5241-A5F6-3092FE7745F8}" type="slidenum">
               <a:rPr lang="en-US" smtClean="0"/>
-              <a:t>10</a:t>
+              <a:t>11</a:t>
             </a:fld>
             <a:endParaRPr lang="en-US"/>
           </a:p>
@@ -671,7 +779,7 @@
 </p:notes>
 </file>
 
-<file path=ppt/notesSlides/notesSlide11.xml><?xml version="1.0" encoding="utf-8"?>
+<file path=ppt/notesSlides/notesSlide12.xml><?xml version="1.0" encoding="utf-8"?>
 <p:notes xmlns:a="http://schemas.openxmlformats.org/drawingml/2006/main" xmlns:r="http://schemas.openxmlformats.org/officeDocument/2006/relationships" xmlns:p="http://schemas.openxmlformats.org/presentationml/2006/main">
   <p:cSld>
     <p:spTree>
@@ -760,7 +868,7 @@
           <a:p>
             <a:fld id="{58151AFC-CD2E-5241-A5F6-3092FE7745F8}" type="slidenum">
               <a:rPr lang="en-US" smtClean="0"/>
-              <a:t>11</a:t>
+              <a:t>12</a:t>
             </a:fld>
             <a:endParaRPr lang="en-US"/>
           </a:p>
@@ -779,7 +887,7 @@
 </p:notes>
 </file>
 
-<file path=ppt/notesSlides/notesSlide12.xml><?xml version="1.0" encoding="utf-8"?>
+<file path=ppt/notesSlides/notesSlide13.xml><?xml version="1.0" encoding="utf-8"?>
 <p:notes xmlns:a="http://schemas.openxmlformats.org/drawingml/2006/main" xmlns:r="http://schemas.openxmlformats.org/officeDocument/2006/relationships" xmlns:p="http://schemas.openxmlformats.org/presentationml/2006/main">
   <p:cSld>
     <p:spTree>
@@ -868,7 +976,7 @@
           <a:p>
             <a:fld id="{58151AFC-CD2E-5241-A5F6-3092FE7745F8}" type="slidenum">
               <a:rPr lang="en-US" smtClean="0"/>
-              <a:t>12</a:t>
+              <a:t>13</a:t>
             </a:fld>
             <a:endParaRPr lang="en-US"/>
           </a:p>
@@ -887,7 +995,7 @@
 </p:notes>
 </file>
 
-<file path=ppt/notesSlides/notesSlide13.xml><?xml version="1.0" encoding="utf-8"?>
+<file path=ppt/notesSlides/notesSlide14.xml><?xml version="1.0" encoding="utf-8"?>
 <p:notes xmlns:a="http://schemas.openxmlformats.org/drawingml/2006/main" xmlns:r="http://schemas.openxmlformats.org/officeDocument/2006/relationships" xmlns:p="http://schemas.openxmlformats.org/presentationml/2006/main">
   <p:cSld>
     <p:spTree>
@@ -976,7 +1084,7 @@
           <a:p>
             <a:fld id="{58151AFC-CD2E-5241-A5F6-3092FE7745F8}" type="slidenum">
               <a:rPr lang="en-US" smtClean="0"/>
-              <a:t>13</a:t>
+              <a:t>14</a:t>
             </a:fld>
             <a:endParaRPr lang="en-US"/>
           </a:p>
@@ -986,90 +1094,6 @@
     <p:extLst>
       <p:ext uri="{BB962C8B-B14F-4D97-AF65-F5344CB8AC3E}">
         <p14:creationId xmlns:p14="http://schemas.microsoft.com/office/powerpoint/2010/main" val="361554886"/>
-      </p:ext>
-    </p:extLst>
-  </p:cSld>
-  <p:clrMapOvr>
-    <a:masterClrMapping/>
-  </p:clrMapOvr>
-</p:notes>
-</file>
-
-<file path=ppt/notesSlides/notesSlide14.xml><?xml version="1.0" encoding="utf-8"?>
-<p:notes xmlns:a="http://schemas.openxmlformats.org/drawingml/2006/main" xmlns:r="http://schemas.openxmlformats.org/officeDocument/2006/relationships" xmlns:p="http://schemas.openxmlformats.org/presentationml/2006/main">
-  <p:cSld>
-    <p:spTree>
-      <p:nvGrpSpPr>
-        <p:cNvPr id="1" name=""/>
-        <p:cNvGrpSpPr/>
-        <p:nvPr/>
-      </p:nvGrpSpPr>
-      <p:grpSpPr>
-        <a:xfrm>
-          <a:off x="0" y="0"/>
-          <a:ext cx="0" cy="0"/>
-          <a:chOff x="0" y="0"/>
-          <a:chExt cx="0" cy="0"/>
-        </a:xfrm>
-      </p:grpSpPr>
-      <p:sp>
-        <p:nvSpPr>
-          <p:cNvPr id="2" name="Slide Image Placeholder 1"/>
-          <p:cNvSpPr>
-            <a:spLocks noGrp="1" noRot="1" noChangeAspect="1"/>
-          </p:cNvSpPr>
-          <p:nvPr>
-            <p:ph type="sldImg"/>
-          </p:nvPr>
-        </p:nvSpPr>
-        <p:spPr/>
-      </p:sp>
-      <p:sp>
-        <p:nvSpPr>
-          <p:cNvPr id="3" name="Notes Placeholder 2"/>
-          <p:cNvSpPr>
-            <a:spLocks noGrp="1"/>
-          </p:cNvSpPr>
-          <p:nvPr>
-            <p:ph type="body" idx="1"/>
-          </p:nvPr>
-        </p:nvSpPr>
-        <p:spPr/>
-        <p:txBody>
-          <a:bodyPr/>
-          <a:lstStyle/>
-          <a:p>
-            <a:endParaRPr lang="en-US"/>
-          </a:p>
-        </p:txBody>
-      </p:sp>
-      <p:sp>
-        <p:nvSpPr>
-          <p:cNvPr id="4" name="Slide Number Placeholder 3"/>
-          <p:cNvSpPr>
-            <a:spLocks noGrp="1"/>
-          </p:cNvSpPr>
-          <p:nvPr>
-            <p:ph type="sldNum" sz="quarter" idx="5"/>
-          </p:nvPr>
-        </p:nvSpPr>
-        <p:spPr/>
-        <p:txBody>
-          <a:bodyPr/>
-          <a:lstStyle/>
-          <a:p>
-            <a:fld id="{58151AFC-CD2E-5241-A5F6-3092FE7745F8}" type="slidenum">
-              <a:rPr lang="en-US" smtClean="0"/>
-              <a:t>14</a:t>
-            </a:fld>
-            <a:endParaRPr lang="en-US"/>
-          </a:p>
-        </p:txBody>
-      </p:sp>
-    </p:spTree>
-    <p:extLst>
-      <p:ext uri="{BB962C8B-B14F-4D97-AF65-F5344CB8AC3E}">
-        <p14:creationId xmlns:p14="http://schemas.microsoft.com/office/powerpoint/2010/main" val="1108410432"/>
       </p:ext>
     </p:extLst>
   </p:cSld>
@@ -1087,7 +1111,7 @@
         <p:cNvPr id="1" name="">
           <a:extLst>
             <a:ext uri="{FF2B5EF4-FFF2-40B4-BE49-F238E27FC236}">
-              <a16:creationId xmlns:a16="http://schemas.microsoft.com/office/drawing/2014/main" id="{E34CB1EC-59DA-15FF-E479-BB14D2DEF9B1}"/>
+              <a16:creationId xmlns:a16="http://schemas.microsoft.com/office/drawing/2014/main" id="{95A845E8-CC21-64C4-286E-CE5E0507FA73}"/>
             </a:ext>
           </a:extLst>
         </p:cNvPr>
@@ -1107,7 +1131,7 @@
           <p:cNvPr id="2" name="Slide Image Placeholder 1">
             <a:extLst>
               <a:ext uri="{FF2B5EF4-FFF2-40B4-BE49-F238E27FC236}">
-                <a16:creationId xmlns:a16="http://schemas.microsoft.com/office/drawing/2014/main" id="{637918DC-E7C4-918D-86E6-E08A1B15A787}"/>
+                <a16:creationId xmlns:a16="http://schemas.microsoft.com/office/drawing/2014/main" id="{9103B829-0F30-8A15-D418-BE6939DE7AB8}"/>
               </a:ext>
             </a:extLst>
           </p:cNvPr>
@@ -1125,7 +1149,7 @@
           <p:cNvPr id="3" name="Notes Placeholder 2">
             <a:extLst>
               <a:ext uri="{FF2B5EF4-FFF2-40B4-BE49-F238E27FC236}">
-                <a16:creationId xmlns:a16="http://schemas.microsoft.com/office/drawing/2014/main" id="{B1B4CB03-8AA7-210D-B5E1-6E1F670143FE}"/>
+                <a16:creationId xmlns:a16="http://schemas.microsoft.com/office/drawing/2014/main" id="{A0D4F91D-22DD-B388-71F9-E7E2F14AE638}"/>
               </a:ext>
             </a:extLst>
           </p:cNvPr>
@@ -1150,7 +1174,7 @@
           <p:cNvPr id="4" name="Slide Number Placeholder 3">
             <a:extLst>
               <a:ext uri="{FF2B5EF4-FFF2-40B4-BE49-F238E27FC236}">
-                <a16:creationId xmlns:a16="http://schemas.microsoft.com/office/drawing/2014/main" id="{D6BC4180-7DF3-899A-A3A4-0065F2DC487C}"/>
+                <a16:creationId xmlns:a16="http://schemas.microsoft.com/office/drawing/2014/main" id="{8DC2106D-81CC-F4C6-B0F0-2AC71B06C028}"/>
               </a:ext>
             </a:extLst>
           </p:cNvPr>
@@ -1177,7 +1201,7 @@
     </p:spTree>
     <p:extLst>
       <p:ext uri="{BB962C8B-B14F-4D97-AF65-F5344CB8AC3E}">
-        <p14:creationId xmlns:p14="http://schemas.microsoft.com/office/powerpoint/2010/main" val="542226404"/>
+        <p14:creationId xmlns:p14="http://schemas.microsoft.com/office/powerpoint/2010/main" val="1270188176"/>
       </p:ext>
     </p:extLst>
   </p:cSld>
@@ -1192,10 +1216,94 @@
   <p:cSld>
     <p:spTree>
       <p:nvGrpSpPr>
+        <p:cNvPr id="1" name=""/>
+        <p:cNvGrpSpPr/>
+        <p:nvPr/>
+      </p:nvGrpSpPr>
+      <p:grpSpPr>
+        <a:xfrm>
+          <a:off x="0" y="0"/>
+          <a:ext cx="0" cy="0"/>
+          <a:chOff x="0" y="0"/>
+          <a:chExt cx="0" cy="0"/>
+        </a:xfrm>
+      </p:grpSpPr>
+      <p:sp>
+        <p:nvSpPr>
+          <p:cNvPr id="2" name="Slide Image Placeholder 1"/>
+          <p:cNvSpPr>
+            <a:spLocks noGrp="1" noRot="1" noChangeAspect="1"/>
+          </p:cNvSpPr>
+          <p:nvPr>
+            <p:ph type="sldImg"/>
+          </p:nvPr>
+        </p:nvSpPr>
+        <p:spPr/>
+      </p:sp>
+      <p:sp>
+        <p:nvSpPr>
+          <p:cNvPr id="3" name="Notes Placeholder 2"/>
+          <p:cNvSpPr>
+            <a:spLocks noGrp="1"/>
+          </p:cNvSpPr>
+          <p:nvPr>
+            <p:ph type="body" idx="1"/>
+          </p:nvPr>
+        </p:nvSpPr>
+        <p:spPr/>
+        <p:txBody>
+          <a:bodyPr/>
+          <a:lstStyle/>
+          <a:p>
+            <a:endParaRPr lang="en-US"/>
+          </a:p>
+        </p:txBody>
+      </p:sp>
+      <p:sp>
+        <p:nvSpPr>
+          <p:cNvPr id="4" name="Slide Number Placeholder 3"/>
+          <p:cNvSpPr>
+            <a:spLocks noGrp="1"/>
+          </p:cNvSpPr>
+          <p:nvPr>
+            <p:ph type="sldNum" sz="quarter" idx="5"/>
+          </p:nvPr>
+        </p:nvSpPr>
+        <p:spPr/>
+        <p:txBody>
+          <a:bodyPr/>
+          <a:lstStyle/>
+          <a:p>
+            <a:fld id="{58151AFC-CD2E-5241-A5F6-3092FE7745F8}" type="slidenum">
+              <a:rPr lang="en-US" smtClean="0"/>
+              <a:t>16</a:t>
+            </a:fld>
+            <a:endParaRPr lang="en-US"/>
+          </a:p>
+        </p:txBody>
+      </p:sp>
+    </p:spTree>
+    <p:extLst>
+      <p:ext uri="{BB962C8B-B14F-4D97-AF65-F5344CB8AC3E}">
+        <p14:creationId xmlns:p14="http://schemas.microsoft.com/office/powerpoint/2010/main" val="1108410432"/>
+      </p:ext>
+    </p:extLst>
+  </p:cSld>
+  <p:clrMapOvr>
+    <a:masterClrMapping/>
+  </p:clrMapOvr>
+</p:notes>
+</file>
+
+<file path=ppt/notesSlides/notesSlide2.xml><?xml version="1.0" encoding="utf-8"?>
+<p:notes xmlns:a="http://schemas.openxmlformats.org/drawingml/2006/main" xmlns:r="http://schemas.openxmlformats.org/officeDocument/2006/relationships" xmlns:p="http://schemas.openxmlformats.org/presentationml/2006/main">
+  <p:cSld>
+    <p:spTree>
+      <p:nvGrpSpPr>
         <p:cNvPr id="1" name="">
           <a:extLst>
             <a:ext uri="{FF2B5EF4-FFF2-40B4-BE49-F238E27FC236}">
-              <a16:creationId xmlns:a16="http://schemas.microsoft.com/office/drawing/2014/main" id="{EC9896C3-4E5C-8DF8-F5D2-7F995F1F4B0A}"/>
+              <a16:creationId xmlns:a16="http://schemas.microsoft.com/office/drawing/2014/main" id="{E0A2B0D8-1889-7272-401E-B606A59D8F9E}"/>
             </a:ext>
           </a:extLst>
         </p:cNvPr>
@@ -1215,7 +1323,7 @@
           <p:cNvPr id="2" name="Slide Image Placeholder 1">
             <a:extLst>
               <a:ext uri="{FF2B5EF4-FFF2-40B4-BE49-F238E27FC236}">
-                <a16:creationId xmlns:a16="http://schemas.microsoft.com/office/drawing/2014/main" id="{1DFB72AE-E8E2-972D-0DB2-DBB98DFEA15F}"/>
+                <a16:creationId xmlns:a16="http://schemas.microsoft.com/office/drawing/2014/main" id="{CE618E5C-6250-B3BD-A6F0-D33D0EB9F869}"/>
               </a:ext>
             </a:extLst>
           </p:cNvPr>
@@ -1233,7 +1341,7 @@
           <p:cNvPr id="3" name="Notes Placeholder 2">
             <a:extLst>
               <a:ext uri="{FF2B5EF4-FFF2-40B4-BE49-F238E27FC236}">
-                <a16:creationId xmlns:a16="http://schemas.microsoft.com/office/drawing/2014/main" id="{481BA422-A643-5A7C-BFFE-A7E7AAFAC322}"/>
+                <a16:creationId xmlns:a16="http://schemas.microsoft.com/office/drawing/2014/main" id="{887DD196-3F35-B8B6-7E77-34C315C24397}"/>
               </a:ext>
             </a:extLst>
           </p:cNvPr>
@@ -1249,7 +1357,10 @@
           <a:bodyPr/>
           <a:lstStyle/>
           <a:p>
-            <a:endParaRPr lang="en-US"/>
+            <a:r>
+              <a:rPr lang="en-US" dirty="0"/>
+              <a:t>Between two samples there may be significant variation but on aggregate these changes mostly cancel each other out. </a:t>
+            </a:r>
           </a:p>
         </p:txBody>
       </p:sp>
@@ -1258,7 +1369,7 @@
           <p:cNvPr id="4" name="Slide Number Placeholder 3">
             <a:extLst>
               <a:ext uri="{FF2B5EF4-FFF2-40B4-BE49-F238E27FC236}">
-                <a16:creationId xmlns:a16="http://schemas.microsoft.com/office/drawing/2014/main" id="{D05CB17E-A705-E38F-ECC2-0FD66CDF6878}"/>
+                <a16:creationId xmlns:a16="http://schemas.microsoft.com/office/drawing/2014/main" id="{F6FE0741-40D8-A4B0-C68C-781426F100BC}"/>
               </a:ext>
             </a:extLst>
           </p:cNvPr>
@@ -1276,7 +1387,7 @@
           <a:p>
             <a:fld id="{58151AFC-CD2E-5241-A5F6-3092FE7745F8}" type="slidenum">
               <a:rPr lang="en-US" smtClean="0"/>
-              <a:t>16</a:t>
+              <a:t>2</a:t>
             </a:fld>
             <a:endParaRPr lang="en-US"/>
           </a:p>
@@ -1285,7 +1396,7 @@
     </p:spTree>
     <p:extLst>
       <p:ext uri="{BB962C8B-B14F-4D97-AF65-F5344CB8AC3E}">
-        <p14:creationId xmlns:p14="http://schemas.microsoft.com/office/powerpoint/2010/main" val="2651660098"/>
+        <p14:creationId xmlns:p14="http://schemas.microsoft.com/office/powerpoint/2010/main" val="3587426838"/>
       </p:ext>
     </p:extLst>
   </p:cSld>
@@ -1295,7 +1406,7 @@
 </p:notes>
 </file>
 
-<file path=ppt/notesSlides/notesSlide2.xml><?xml version="1.0" encoding="utf-8"?>
+<file path=ppt/notesSlides/notesSlide3.xml><?xml version="1.0" encoding="utf-8"?>
 <p:notes xmlns:a="http://schemas.openxmlformats.org/drawingml/2006/main" xmlns:r="http://schemas.openxmlformats.org/officeDocument/2006/relationships" xmlns:p="http://schemas.openxmlformats.org/presentationml/2006/main">
   <p:cSld>
     <p:spTree>
@@ -1384,7 +1495,7 @@
           <a:p>
             <a:fld id="{58151AFC-CD2E-5241-A5F6-3092FE7745F8}" type="slidenum">
               <a:rPr lang="en-US" smtClean="0"/>
-              <a:t>2</a:t>
+              <a:t>3</a:t>
             </a:fld>
             <a:endParaRPr lang="en-US"/>
           </a:p>
@@ -1403,7 +1514,7 @@
 </p:notes>
 </file>
 
-<file path=ppt/notesSlides/notesSlide3.xml><?xml version="1.0" encoding="utf-8"?>
+<file path=ppt/notesSlides/notesSlide4.xml><?xml version="1.0" encoding="utf-8"?>
 <p:notes xmlns:a="http://schemas.openxmlformats.org/drawingml/2006/main" xmlns:r="http://schemas.openxmlformats.org/officeDocument/2006/relationships" xmlns:p="http://schemas.openxmlformats.org/presentationml/2006/main">
   <p:cSld>
     <p:spTree>
@@ -1492,7 +1603,7 @@
           <a:p>
             <a:fld id="{58151AFC-CD2E-5241-A5F6-3092FE7745F8}" type="slidenum">
               <a:rPr lang="en-US" smtClean="0"/>
-              <a:t>3</a:t>
+              <a:t>4</a:t>
             </a:fld>
             <a:endParaRPr lang="en-US"/>
           </a:p>
@@ -1511,7 +1622,7 @@
 </p:notes>
 </file>
 
-<file path=ppt/notesSlides/notesSlide4.xml><?xml version="1.0" encoding="utf-8"?>
+<file path=ppt/notesSlides/notesSlide5.xml><?xml version="1.0" encoding="utf-8"?>
 <p:notes xmlns:a="http://schemas.openxmlformats.org/drawingml/2006/main" xmlns:r="http://schemas.openxmlformats.org/officeDocument/2006/relationships" xmlns:p="http://schemas.openxmlformats.org/presentationml/2006/main">
   <p:cSld>
     <p:spTree>
@@ -1600,7 +1711,7 @@
           <a:p>
             <a:fld id="{58151AFC-CD2E-5241-A5F6-3092FE7745F8}" type="slidenum">
               <a:rPr lang="en-US" smtClean="0"/>
-              <a:t>4</a:t>
+              <a:t>5</a:t>
             </a:fld>
             <a:endParaRPr lang="en-US"/>
           </a:p>
@@ -1619,7 +1730,7 @@
 </p:notes>
 </file>
 
-<file path=ppt/notesSlides/notesSlide5.xml><?xml version="1.0" encoding="utf-8"?>
+<file path=ppt/notesSlides/notesSlide6.xml><?xml version="1.0" encoding="utf-8"?>
 <p:notes xmlns:a="http://schemas.openxmlformats.org/drawingml/2006/main" xmlns:r="http://schemas.openxmlformats.org/officeDocument/2006/relationships" xmlns:p="http://schemas.openxmlformats.org/presentationml/2006/main">
   <p:cSld>
     <p:spTree>
@@ -1708,7 +1819,7 @@
           <a:p>
             <a:fld id="{58151AFC-CD2E-5241-A5F6-3092FE7745F8}" type="slidenum">
               <a:rPr lang="en-US" smtClean="0"/>
-              <a:t>5</a:t>
+              <a:t>6</a:t>
             </a:fld>
             <a:endParaRPr lang="en-US"/>
           </a:p>
@@ -1727,7 +1838,7 @@
 </p:notes>
 </file>
 
-<file path=ppt/notesSlides/notesSlide6.xml><?xml version="1.0" encoding="utf-8"?>
+<file path=ppt/notesSlides/notesSlide7.xml><?xml version="1.0" encoding="utf-8"?>
 <p:notes xmlns:a="http://schemas.openxmlformats.org/drawingml/2006/main" xmlns:r="http://schemas.openxmlformats.org/officeDocument/2006/relationships" xmlns:p="http://schemas.openxmlformats.org/presentationml/2006/main">
   <p:cSld>
     <p:spTree>
@@ -1816,7 +1927,7 @@
           <a:p>
             <a:fld id="{58151AFC-CD2E-5241-A5F6-3092FE7745F8}" type="slidenum">
               <a:rPr lang="en-US" smtClean="0"/>
-              <a:t>6</a:t>
+              <a:t>7</a:t>
             </a:fld>
             <a:endParaRPr lang="en-US"/>
           </a:p>
@@ -1835,7 +1946,7 @@
 </p:notes>
 </file>
 
-<file path=ppt/notesSlides/notesSlide7.xml><?xml version="1.0" encoding="utf-8"?>
+<file path=ppt/notesSlides/notesSlide8.xml><?xml version="1.0" encoding="utf-8"?>
 <p:notes xmlns:a="http://schemas.openxmlformats.org/drawingml/2006/main" xmlns:r="http://schemas.openxmlformats.org/officeDocument/2006/relationships" xmlns:p="http://schemas.openxmlformats.org/presentationml/2006/main">
   <p:cSld>
     <p:spTree>
@@ -1924,7 +2035,7 @@
           <a:p>
             <a:fld id="{58151AFC-CD2E-5241-A5F6-3092FE7745F8}" type="slidenum">
               <a:rPr lang="en-US" smtClean="0"/>
-              <a:t>7</a:t>
+              <a:t>8</a:t>
             </a:fld>
             <a:endParaRPr lang="en-US"/>
           </a:p>
@@ -1943,7 +2054,7 @@
 </p:notes>
 </file>
 
-<file path=ppt/notesSlides/notesSlide8.xml><?xml version="1.0" encoding="utf-8"?>
+<file path=ppt/notesSlides/notesSlide9.xml><?xml version="1.0" encoding="utf-8"?>
 <p:notes xmlns:a="http://schemas.openxmlformats.org/drawingml/2006/main" xmlns:r="http://schemas.openxmlformats.org/officeDocument/2006/relationships" xmlns:p="http://schemas.openxmlformats.org/presentationml/2006/main">
   <p:cSld>
     <p:spTree>
@@ -2032,7 +2143,7 @@
           <a:p>
             <a:fld id="{58151AFC-CD2E-5241-A5F6-3092FE7745F8}" type="slidenum">
               <a:rPr lang="en-US" smtClean="0"/>
-              <a:t>8</a:t>
+              <a:t>9</a:t>
             </a:fld>
             <a:endParaRPr lang="en-US"/>
           </a:p>
@@ -2042,114 +2153,6 @@
     <p:extLst>
       <p:ext uri="{BB962C8B-B14F-4D97-AF65-F5344CB8AC3E}">
         <p14:creationId xmlns:p14="http://schemas.microsoft.com/office/powerpoint/2010/main" val="987868943"/>
-      </p:ext>
-    </p:extLst>
-  </p:cSld>
-  <p:clrMapOvr>
-    <a:masterClrMapping/>
-  </p:clrMapOvr>
-</p:notes>
-</file>
-
-<file path=ppt/notesSlides/notesSlide9.xml><?xml version="1.0" encoding="utf-8"?>
-<p:notes xmlns:a="http://schemas.openxmlformats.org/drawingml/2006/main" xmlns:r="http://schemas.openxmlformats.org/officeDocument/2006/relationships" xmlns:p="http://schemas.openxmlformats.org/presentationml/2006/main">
-  <p:cSld>
-    <p:spTree>
-      <p:nvGrpSpPr>
-        <p:cNvPr id="1" name="">
-          <a:extLst>
-            <a:ext uri="{FF2B5EF4-FFF2-40B4-BE49-F238E27FC236}">
-              <a16:creationId xmlns:a16="http://schemas.microsoft.com/office/drawing/2014/main" id="{78742C8A-26A4-7483-62E8-904951EA9597}"/>
-            </a:ext>
-          </a:extLst>
-        </p:cNvPr>
-        <p:cNvGrpSpPr/>
-        <p:nvPr/>
-      </p:nvGrpSpPr>
-      <p:grpSpPr>
-        <a:xfrm>
-          <a:off x="0" y="0"/>
-          <a:ext cx="0" cy="0"/>
-          <a:chOff x="0" y="0"/>
-          <a:chExt cx="0" cy="0"/>
-        </a:xfrm>
-      </p:grpSpPr>
-      <p:sp>
-        <p:nvSpPr>
-          <p:cNvPr id="2" name="Slide Image Placeholder 1">
-            <a:extLst>
-              <a:ext uri="{FF2B5EF4-FFF2-40B4-BE49-F238E27FC236}">
-                <a16:creationId xmlns:a16="http://schemas.microsoft.com/office/drawing/2014/main" id="{8673EE9D-6E90-6F07-1899-90C345C70F2F}"/>
-              </a:ext>
-            </a:extLst>
-          </p:cNvPr>
-          <p:cNvSpPr>
-            <a:spLocks noGrp="1" noRot="1" noChangeAspect="1"/>
-          </p:cNvSpPr>
-          <p:nvPr>
-            <p:ph type="sldImg"/>
-          </p:nvPr>
-        </p:nvSpPr>
-        <p:spPr/>
-      </p:sp>
-      <p:sp>
-        <p:nvSpPr>
-          <p:cNvPr id="3" name="Notes Placeholder 2">
-            <a:extLst>
-              <a:ext uri="{FF2B5EF4-FFF2-40B4-BE49-F238E27FC236}">
-                <a16:creationId xmlns:a16="http://schemas.microsoft.com/office/drawing/2014/main" id="{C4CF999A-DD2F-2E20-912A-159B97E77A5C}"/>
-              </a:ext>
-            </a:extLst>
-          </p:cNvPr>
-          <p:cNvSpPr>
-            <a:spLocks noGrp="1"/>
-          </p:cNvSpPr>
-          <p:nvPr>
-            <p:ph type="body" idx="1"/>
-          </p:nvPr>
-        </p:nvSpPr>
-        <p:spPr/>
-        <p:txBody>
-          <a:bodyPr/>
-          <a:lstStyle/>
-          <a:p>
-            <a:endParaRPr lang="en-US"/>
-          </a:p>
-        </p:txBody>
-      </p:sp>
-      <p:sp>
-        <p:nvSpPr>
-          <p:cNvPr id="4" name="Slide Number Placeholder 3">
-            <a:extLst>
-              <a:ext uri="{FF2B5EF4-FFF2-40B4-BE49-F238E27FC236}">
-                <a16:creationId xmlns:a16="http://schemas.microsoft.com/office/drawing/2014/main" id="{09350B96-A550-2069-FA53-BA6B4CCAEDA8}"/>
-              </a:ext>
-            </a:extLst>
-          </p:cNvPr>
-          <p:cNvSpPr>
-            <a:spLocks noGrp="1"/>
-          </p:cNvSpPr>
-          <p:nvPr>
-            <p:ph type="sldNum" sz="quarter" idx="5"/>
-          </p:nvPr>
-        </p:nvSpPr>
-        <p:spPr/>
-        <p:txBody>
-          <a:bodyPr/>
-          <a:lstStyle/>
-          <a:p>
-            <a:fld id="{58151AFC-CD2E-5241-A5F6-3092FE7745F8}" type="slidenum">
-              <a:rPr lang="en-US" smtClean="0"/>
-              <a:t>9</a:t>
-            </a:fld>
-            <a:endParaRPr lang="en-US"/>
-          </a:p>
-        </p:txBody>
-      </p:sp>
-    </p:spTree>
-    <p:extLst>
-      <p:ext uri="{BB962C8B-B14F-4D97-AF65-F5344CB8AC3E}">
-        <p14:creationId xmlns:p14="http://schemas.microsoft.com/office/powerpoint/2010/main" val="3103479242"/>
       </p:ext>
     </p:extLst>
   </p:cSld>
@@ -4998,6 +5001,182 @@
         <p:cNvPr id="1" name="">
           <a:extLst>
             <a:ext uri="{FF2B5EF4-FFF2-40B4-BE49-F238E27FC236}">
+              <a16:creationId xmlns:a16="http://schemas.microsoft.com/office/drawing/2014/main" id="{1A4EB970-AB51-855E-AEB1-DA57EAA32C74}"/>
+            </a:ext>
+          </a:extLst>
+        </p:cNvPr>
+        <p:cNvGrpSpPr/>
+        <p:nvPr/>
+      </p:nvGrpSpPr>
+      <p:grpSpPr>
+        <a:xfrm>
+          <a:off x="0" y="0"/>
+          <a:ext cx="0" cy="0"/>
+          <a:chOff x="0" y="0"/>
+          <a:chExt cx="0" cy="0"/>
+        </a:xfrm>
+      </p:grpSpPr>
+      <p:sp>
+        <p:nvSpPr>
+          <p:cNvPr id="7" name="Title 6">
+            <a:extLst>
+              <a:ext uri="{FF2B5EF4-FFF2-40B4-BE49-F238E27FC236}">
+                <a16:creationId xmlns:a16="http://schemas.microsoft.com/office/drawing/2014/main" id="{FC235DAD-95F8-F669-C197-C08575AFC268}"/>
+              </a:ext>
+            </a:extLst>
+          </p:cNvPr>
+          <p:cNvSpPr>
+            <a:spLocks noGrp="1"/>
+          </p:cNvSpPr>
+          <p:nvPr>
+            <p:ph type="title"/>
+          </p:nvPr>
+        </p:nvSpPr>
+        <p:spPr>
+          <a:xfrm>
+            <a:off x="457200" y="702134"/>
+            <a:ext cx="10896600" cy="517065"/>
+          </a:xfrm>
+        </p:spPr>
+        <p:txBody>
+          <a:bodyPr wrap="square" anchor="b">
+            <a:normAutofit/>
+          </a:bodyPr>
+          <a:lstStyle/>
+          <a:p>
+            <a:r>
+              <a:rPr lang="en-US" dirty="0"/>
+              <a:t>Statistical Significance CD8 Gene Expression – R vs NR</a:t>
+            </a:r>
+          </a:p>
+        </p:txBody>
+      </p:sp>
+      <p:sp>
+        <p:nvSpPr>
+          <p:cNvPr id="12" name="Text Placeholder 3">
+            <a:extLst>
+              <a:ext uri="{FF2B5EF4-FFF2-40B4-BE49-F238E27FC236}">
+                <a16:creationId xmlns:a16="http://schemas.microsoft.com/office/drawing/2014/main" id="{B5443D08-AC6B-9E2D-ED3C-2CE83A0E00E6}"/>
+              </a:ext>
+            </a:extLst>
+          </p:cNvPr>
+          <p:cNvSpPr>
+            <a:spLocks noGrp="1"/>
+          </p:cNvSpPr>
+          <p:nvPr>
+            <p:ph type="body" sz="quarter" idx="14"/>
+          </p:nvPr>
+        </p:nvSpPr>
+        <p:spPr>
+          <a:xfrm>
+            <a:off x="0" y="6534055"/>
+            <a:ext cx="4460516" cy="323165"/>
+          </a:xfrm>
+        </p:spPr>
+        <p:txBody>
+          <a:bodyPr/>
+          <a:lstStyle/>
+          <a:p>
+            <a:endParaRPr lang="en-US"/>
+          </a:p>
+        </p:txBody>
+      </p:sp>
+      <p:sp>
+        <p:nvSpPr>
+          <p:cNvPr id="14" name="Content Placeholder 4">
+            <a:extLst>
+              <a:ext uri="{FF2B5EF4-FFF2-40B4-BE49-F238E27FC236}">
+                <a16:creationId xmlns:a16="http://schemas.microsoft.com/office/drawing/2014/main" id="{FFF3E895-CB6B-4EFA-C0F7-6ECF75B131C1}"/>
+              </a:ext>
+            </a:extLst>
+          </p:cNvPr>
+          <p:cNvSpPr>
+            <a:spLocks noGrp="1"/>
+          </p:cNvSpPr>
+          <p:nvPr>
+            <p:ph sz="quarter" idx="15"/>
+          </p:nvPr>
+        </p:nvSpPr>
+        <p:spPr>
+          <a:xfrm>
+            <a:off x="5621035" y="1805612"/>
+            <a:ext cx="4431287" cy="1789208"/>
+          </a:xfrm>
+        </p:spPr>
+        <p:txBody>
+          <a:bodyPr/>
+          <a:lstStyle/>
+          <a:p>
+            <a:r>
+              <a:rPr lang="en-US" dirty="0"/>
+              <a:t>Param: 0.5% CD8 threshold</a:t>
+            </a:r>
+          </a:p>
+          <a:p>
+            <a:r>
+              <a:rPr lang="en-US" dirty="0"/>
+              <a:t>Each sample CD8 expression averaged</a:t>
+            </a:r>
+          </a:p>
+          <a:p>
+            <a:r>
+              <a:rPr lang="en-US" dirty="0"/>
+              <a:t>No notable differences</a:t>
+            </a:r>
+          </a:p>
+        </p:txBody>
+      </p:sp>
+      <p:pic>
+        <p:nvPicPr>
+          <p:cNvPr id="6" name="Picture 5">
+            <a:extLst>
+              <a:ext uri="{FF2B5EF4-FFF2-40B4-BE49-F238E27FC236}">
+                <a16:creationId xmlns:a16="http://schemas.microsoft.com/office/drawing/2014/main" id="{09F86524-9CA5-AA3E-BDBB-729F456CED38}"/>
+              </a:ext>
+            </a:extLst>
+          </p:cNvPr>
+          <p:cNvPicPr>
+            <a:picLocks noChangeAspect="1"/>
+          </p:cNvPicPr>
+          <p:nvPr/>
+        </p:nvPicPr>
+        <p:blipFill>
+          <a:blip r:embed="rId3"/>
+          <a:stretch>
+            <a:fillRect/>
+          </a:stretch>
+        </p:blipFill>
+        <p:spPr>
+          <a:xfrm>
+            <a:off x="715174" y="1621721"/>
+            <a:ext cx="4460516" cy="4349558"/>
+          </a:xfrm>
+          <a:prstGeom prst="rect">
+            <a:avLst/>
+          </a:prstGeom>
+        </p:spPr>
+      </p:pic>
+    </p:spTree>
+    <p:extLst>
+      <p:ext uri="{BB962C8B-B14F-4D97-AF65-F5344CB8AC3E}">
+        <p14:creationId xmlns:p14="http://schemas.microsoft.com/office/powerpoint/2010/main" val="2790761111"/>
+      </p:ext>
+    </p:extLst>
+  </p:cSld>
+  <p:clrMapOvr>
+    <a:masterClrMapping/>
+  </p:clrMapOvr>
+</p:sld>
+</file>
+
+<file path=ppt/slides/slide11.xml><?xml version="1.0" encoding="utf-8"?>
+<p:sld xmlns:a="http://schemas.openxmlformats.org/drawingml/2006/main" xmlns:r="http://schemas.openxmlformats.org/officeDocument/2006/relationships" xmlns:p="http://schemas.openxmlformats.org/presentationml/2006/main">
+  <p:cSld>
+    <p:spTree>
+      <p:nvGrpSpPr>
+        <p:cNvPr id="1" name="">
+          <a:extLst>
+            <a:ext uri="{FF2B5EF4-FFF2-40B4-BE49-F238E27FC236}">
               <a16:creationId xmlns:a16="http://schemas.microsoft.com/office/drawing/2014/main" id="{A6D80D93-0201-CE87-4C03-C98D7B8C65BF}"/>
             </a:ext>
           </a:extLst>
@@ -5159,7 +5338,7 @@
 </p:sld>
 </file>
 
-<file path=ppt/slides/slide11.xml><?xml version="1.0" encoding="utf-8"?>
+<file path=ppt/slides/slide12.xml><?xml version="1.0" encoding="utf-8"?>
 <p:sld xmlns:a="http://schemas.openxmlformats.org/drawingml/2006/main" xmlns:r="http://schemas.openxmlformats.org/officeDocument/2006/relationships" xmlns:p="http://schemas.openxmlformats.org/presentationml/2006/main">
   <p:cSld>
     <p:spTree>
@@ -5277,7 +5456,7 @@
 </p:sld>
 </file>
 
-<file path=ppt/slides/slide12.xml><?xml version="1.0" encoding="utf-8"?>
+<file path=ppt/slides/slide13.xml><?xml version="1.0" encoding="utf-8"?>
 <p:sld xmlns:a="http://schemas.openxmlformats.org/drawingml/2006/main" xmlns:r="http://schemas.openxmlformats.org/officeDocument/2006/relationships" xmlns:p="http://schemas.openxmlformats.org/presentationml/2006/main">
   <p:cSld>
     <p:spTree>
@@ -5499,7 +5678,7 @@
 </p:sld>
 </file>
 
-<file path=ppt/slides/slide13.xml><?xml version="1.0" encoding="utf-8"?>
+<file path=ppt/slides/slide14.xml><?xml version="1.0" encoding="utf-8"?>
 <p:sld xmlns:a="http://schemas.openxmlformats.org/drawingml/2006/main" xmlns:r="http://schemas.openxmlformats.org/officeDocument/2006/relationships" xmlns:p="http://schemas.openxmlformats.org/presentationml/2006/main">
   <p:cSld>
     <p:spTree>
@@ -5543,7 +5722,10 @@
           <a:bodyPr/>
           <a:lstStyle/>
           <a:p>
-            <a:endParaRPr lang="en-US" dirty="0"/>
+            <a:r>
+              <a:rPr lang="en-US" dirty="0"/>
+              <a:t>Lieden Clustering Protein Verification</a:t>
+            </a:r>
           </a:p>
         </p:txBody>
       </p:sp>
@@ -5591,76 +5773,84 @@
         <p:spPr>
           <a:xfrm>
             <a:off x="457200" y="1594034"/>
-            <a:ext cx="10896600" cy="4636497"/>
-          </a:xfrm>
-        </p:spPr>
-        <p:txBody>
-          <a:bodyPr/>
-          <a:lstStyle/>
-          <a:p>
-            <a:endParaRPr lang="en-US" dirty="0"/>
-          </a:p>
-        </p:txBody>
-      </p:sp>
+            <a:ext cx="10896600" cy="1172629"/>
+          </a:xfrm>
+        </p:spPr>
+        <p:txBody>
+          <a:bodyPr/>
+          <a:lstStyle/>
+          <a:p>
+            <a:r>
+              <a:rPr lang="en-US" dirty="0"/>
+              <a:t>One way to find neutrophils in the mRNA datasets would be use some sort of clustering software to find something that I am missing. Doesn’t align with current mappings. Reviewing Athena’s code to use specific markers</a:t>
+            </a:r>
+          </a:p>
+        </p:txBody>
+      </p:sp>
+      <p:pic>
+        <p:nvPicPr>
+          <p:cNvPr id="5" name="Picture 4">
+            <a:extLst>
+              <a:ext uri="{FF2B5EF4-FFF2-40B4-BE49-F238E27FC236}">
+                <a16:creationId xmlns:a16="http://schemas.microsoft.com/office/drawing/2014/main" id="{D6DE3AB9-E508-B7FF-9138-09BA70D9205D}"/>
+              </a:ext>
+            </a:extLst>
+          </p:cNvPr>
+          <p:cNvPicPr>
+            <a:picLocks noChangeAspect="1"/>
+          </p:cNvPicPr>
+          <p:nvPr/>
+        </p:nvPicPr>
+        <p:blipFill>
+          <a:blip r:embed="rId3"/>
+          <a:stretch>
+            <a:fillRect/>
+          </a:stretch>
+        </p:blipFill>
+        <p:spPr>
+          <a:xfrm>
+            <a:off x="245660" y="2718725"/>
+            <a:ext cx="4987350" cy="3162059"/>
+          </a:xfrm>
+          <a:prstGeom prst="rect">
+            <a:avLst/>
+          </a:prstGeom>
+        </p:spPr>
+      </p:pic>
+      <p:pic>
+        <p:nvPicPr>
+          <p:cNvPr id="8" name="Picture 7">
+            <a:extLst>
+              <a:ext uri="{FF2B5EF4-FFF2-40B4-BE49-F238E27FC236}">
+                <a16:creationId xmlns:a16="http://schemas.microsoft.com/office/drawing/2014/main" id="{E4BA8BBB-C8D2-485D-7A2B-E49705C0FFDF}"/>
+              </a:ext>
+            </a:extLst>
+          </p:cNvPr>
+          <p:cNvPicPr>
+            <a:picLocks noChangeAspect="1"/>
+          </p:cNvPicPr>
+          <p:nvPr/>
+        </p:nvPicPr>
+        <p:blipFill>
+          <a:blip r:embed="rId4"/>
+          <a:stretch>
+            <a:fillRect/>
+          </a:stretch>
+        </p:blipFill>
+        <p:spPr>
+          <a:xfrm>
+            <a:off x="5438777" y="2911053"/>
+            <a:ext cx="5251403" cy="3413234"/>
+          </a:xfrm>
+          <a:prstGeom prst="rect">
+            <a:avLst/>
+          </a:prstGeom>
+        </p:spPr>
+      </p:pic>
     </p:spTree>
     <p:extLst>
       <p:ext uri="{BB962C8B-B14F-4D97-AF65-F5344CB8AC3E}">
         <p14:creationId xmlns:p14="http://schemas.microsoft.com/office/powerpoint/2010/main" val="679477984"/>
-      </p:ext>
-    </p:extLst>
-  </p:cSld>
-  <p:clrMapOvr>
-    <a:masterClrMapping/>
-  </p:clrMapOvr>
-</p:sld>
-</file>
-
-<file path=ppt/slides/slide14.xml><?xml version="1.0" encoding="utf-8"?>
-<p:sld xmlns:a="http://schemas.openxmlformats.org/drawingml/2006/main" xmlns:r="http://schemas.openxmlformats.org/officeDocument/2006/relationships" xmlns:p="http://schemas.openxmlformats.org/presentationml/2006/main">
-  <p:cSld>
-    <p:spTree>
-      <p:nvGrpSpPr>
-        <p:cNvPr id="1" name=""/>
-        <p:cNvGrpSpPr/>
-        <p:nvPr/>
-      </p:nvGrpSpPr>
-      <p:grpSpPr>
-        <a:xfrm>
-          <a:off x="0" y="0"/>
-          <a:ext cx="0" cy="0"/>
-          <a:chOff x="0" y="0"/>
-          <a:chExt cx="0" cy="0"/>
-        </a:xfrm>
-      </p:grpSpPr>
-      <p:sp>
-        <p:nvSpPr>
-          <p:cNvPr id="4" name="Title 3">
-            <a:extLst>
-              <a:ext uri="{FF2B5EF4-FFF2-40B4-BE49-F238E27FC236}">
-                <a16:creationId xmlns:a16="http://schemas.microsoft.com/office/drawing/2014/main" id="{27831C99-7466-5707-AAF8-25B3E4A5A8CE}"/>
-              </a:ext>
-            </a:extLst>
-          </p:cNvPr>
-          <p:cNvSpPr>
-            <a:spLocks noGrp="1"/>
-          </p:cNvSpPr>
-          <p:nvPr>
-            <p:ph type="title"/>
-          </p:nvPr>
-        </p:nvSpPr>
-        <p:spPr/>
-        <p:txBody>
-          <a:bodyPr/>
-          <a:lstStyle/>
-          <a:p>
-            <a:endParaRPr lang="en-US"/>
-          </a:p>
-        </p:txBody>
-      </p:sp>
-    </p:spTree>
-    <p:extLst>
-      <p:ext uri="{BB962C8B-B14F-4D97-AF65-F5344CB8AC3E}">
-        <p14:creationId xmlns:p14="http://schemas.microsoft.com/office/powerpoint/2010/main" val="2977772304"/>
       </p:ext>
     </p:extLst>
   </p:cSld>
@@ -5678,7 +5868,7 @@
         <p:cNvPr id="1" name="">
           <a:extLst>
             <a:ext uri="{FF2B5EF4-FFF2-40B4-BE49-F238E27FC236}">
-              <a16:creationId xmlns:a16="http://schemas.microsoft.com/office/drawing/2014/main" id="{181DF183-FCD6-610F-9931-804E2BA02C7A}"/>
+              <a16:creationId xmlns:a16="http://schemas.microsoft.com/office/drawing/2014/main" id="{3A8CDBB6-EAA5-A067-04EE-C2C1B7AAFC26}"/>
             </a:ext>
           </a:extLst>
         </p:cNvPr>
@@ -5698,7 +5888,7 @@
           <p:cNvPr id="7" name="Title 6">
             <a:extLst>
               <a:ext uri="{FF2B5EF4-FFF2-40B4-BE49-F238E27FC236}">
-                <a16:creationId xmlns:a16="http://schemas.microsoft.com/office/drawing/2014/main" id="{199273EA-D6F8-B6F0-2710-604FB50C5AD6}"/>
+                <a16:creationId xmlns:a16="http://schemas.microsoft.com/office/drawing/2014/main" id="{993B497D-C508-B52C-FD8A-466B6FA555EF}"/>
               </a:ext>
             </a:extLst>
           </p:cNvPr>
@@ -5709,89 +5899,125 @@
             <p:ph type="title"/>
           </p:nvPr>
         </p:nvSpPr>
-        <p:spPr>
-          <a:xfrm>
-            <a:off x="457200" y="702134"/>
-            <a:ext cx="10896600" cy="517065"/>
-          </a:xfrm>
-        </p:spPr>
-        <p:txBody>
-          <a:bodyPr wrap="square" anchor="b">
-            <a:normAutofit/>
-          </a:bodyPr>
-          <a:lstStyle/>
-          <a:p>
-            <a:r>
-              <a:rPr lang="en-US" dirty="0"/>
-              <a:t>Overall Cell Frequencies </a:t>
-            </a:r>
-          </a:p>
-        </p:txBody>
-      </p:sp>
-      <p:pic>
-        <p:nvPicPr>
-          <p:cNvPr id="5" name="Content Placeholder 4">
-            <a:extLst>
-              <a:ext uri="{FF2B5EF4-FFF2-40B4-BE49-F238E27FC236}">
-                <a16:creationId xmlns:a16="http://schemas.microsoft.com/office/drawing/2014/main" id="{F556B634-8B9E-333A-E602-EE637B3F38E5}"/>
-              </a:ext>
-            </a:extLst>
-          </p:cNvPr>
-          <p:cNvPicPr>
-            <a:picLocks noGrp="1" noChangeAspect="1"/>
-          </p:cNvPicPr>
+        <p:spPr/>
+        <p:txBody>
+          <a:bodyPr/>
+          <a:lstStyle/>
+          <a:p>
+            <a:r>
+              <a:rPr lang="en-US" dirty="0"/>
+              <a:t>Future Directions</a:t>
+            </a:r>
+          </a:p>
+        </p:txBody>
+      </p:sp>
+      <p:sp>
+        <p:nvSpPr>
+          <p:cNvPr id="4" name="Text Placeholder 3">
+            <a:extLst>
+              <a:ext uri="{FF2B5EF4-FFF2-40B4-BE49-F238E27FC236}">
+                <a16:creationId xmlns:a16="http://schemas.microsoft.com/office/drawing/2014/main" id="{C644C35B-4D2B-9F39-6CF0-9C18EE1237FC}"/>
+              </a:ext>
+            </a:extLst>
+          </p:cNvPr>
+          <p:cNvSpPr>
+            <a:spLocks noGrp="1"/>
+          </p:cNvSpPr>
+          <p:nvPr>
+            <p:ph type="body" sz="quarter" idx="14"/>
+          </p:nvPr>
+        </p:nvSpPr>
+        <p:spPr/>
+        <p:txBody>
+          <a:bodyPr/>
+          <a:lstStyle/>
+          <a:p>
+            <a:endParaRPr lang="en-US"/>
+          </a:p>
+        </p:txBody>
+      </p:sp>
+      <p:sp>
+        <p:nvSpPr>
+          <p:cNvPr id="2" name="Content Placeholder 2">
+            <a:extLst>
+              <a:ext uri="{FF2B5EF4-FFF2-40B4-BE49-F238E27FC236}">
+                <a16:creationId xmlns:a16="http://schemas.microsoft.com/office/drawing/2014/main" id="{6046B57D-DDE1-1E13-F447-372D9AE96DC8}"/>
+              </a:ext>
+            </a:extLst>
+          </p:cNvPr>
+          <p:cNvSpPr>
+            <a:spLocks noGrp="1"/>
+          </p:cNvSpPr>
           <p:nvPr>
             <p:ph sz="quarter" idx="13"/>
           </p:nvPr>
-        </p:nvPicPr>
-        <p:blipFill>
-          <a:blip r:embed="rId3"/>
-          <a:stretch>
-            <a:fillRect/>
-          </a:stretch>
-        </p:blipFill>
-        <p:spPr>
-          <a:xfrm>
-            <a:off x="1524000" y="1673256"/>
-            <a:ext cx="9829800" cy="4349688"/>
-          </a:xfrm>
-          <a:noFill/>
-        </p:spPr>
-      </p:pic>
-      <p:sp>
-        <p:nvSpPr>
-          <p:cNvPr id="12" name="Text Placeholder 3">
-            <a:extLst>
-              <a:ext uri="{FF2B5EF4-FFF2-40B4-BE49-F238E27FC236}">
-                <a16:creationId xmlns:a16="http://schemas.microsoft.com/office/drawing/2014/main" id="{5B8E792A-A403-99AC-38B8-0DBEC46D3724}"/>
-              </a:ext>
-            </a:extLst>
-          </p:cNvPr>
-          <p:cNvSpPr>
-            <a:spLocks noGrp="1"/>
-          </p:cNvSpPr>
-          <p:nvPr>
-            <p:ph type="body" sz="quarter" idx="14"/>
-          </p:nvPr>
-        </p:nvSpPr>
-        <p:spPr>
-          <a:xfrm>
-            <a:off x="0" y="6534055"/>
-            <a:ext cx="4460516" cy="323165"/>
-          </a:xfrm>
-        </p:spPr>
-        <p:txBody>
-          <a:bodyPr/>
-          <a:lstStyle/>
-          <a:p>
-            <a:endParaRPr lang="en-US"/>
+        </p:nvSpPr>
+        <p:spPr>
+          <a:xfrm>
+            <a:off x="457200" y="1594034"/>
+            <a:ext cx="10896600" cy="2765885"/>
+          </a:xfrm>
+        </p:spPr>
+        <p:txBody>
+          <a:bodyPr/>
+          <a:lstStyle/>
+          <a:p>
+            <a:pPr marL="514350" indent="-514350">
+              <a:buFont typeface="+mj-lt"/>
+              <a:buAutoNum type="arabicPeriod"/>
+            </a:pPr>
+            <a:r>
+              <a:rPr lang="en-US" dirty="0"/>
+              <a:t>Comparing T-cell mRNA expression between samples with high colocalization and samples with low colocalization.</a:t>
+            </a:r>
+          </a:p>
+          <a:p>
+            <a:pPr marL="514350" indent="-514350">
+              <a:buFont typeface="+mj-lt"/>
+              <a:buAutoNum type="arabicPeriod"/>
+            </a:pPr>
+            <a:r>
+              <a:rPr lang="en-US" dirty="0"/>
+              <a:t>Requesting H&amp;E images of the </a:t>
+            </a:r>
+            <a:r>
+              <a:rPr lang="en-US" dirty="0" err="1"/>
+              <a:t>CosMX</a:t>
+            </a:r>
+            <a:r>
+              <a:rPr lang="en-US" dirty="0"/>
+              <a:t> data</a:t>
+            </a:r>
+          </a:p>
+          <a:p>
+            <a:pPr marL="514350" indent="-514350">
+              <a:buFont typeface="+mj-lt"/>
+              <a:buAutoNum type="arabicPeriod"/>
+            </a:pPr>
+            <a:r>
+              <a:rPr lang="en-US" dirty="0"/>
+              <a:t>Lieden Clustering of the mRNA</a:t>
+            </a:r>
+          </a:p>
+          <a:p>
+            <a:pPr marL="514350" indent="-514350">
+              <a:buFont typeface="+mj-lt"/>
+              <a:buAutoNum type="arabicPeriod"/>
+            </a:pPr>
+            <a:r>
+              <a:rPr lang="en-US" dirty="0"/>
+              <a:t>Looking for cells with low overall mRNA expression as potential neutrophils.</a:t>
+            </a:r>
+          </a:p>
+          <a:p>
+            <a:endParaRPr lang="en-US" dirty="0"/>
           </a:p>
         </p:txBody>
       </p:sp>
     </p:spTree>
     <p:extLst>
       <p:ext uri="{BB962C8B-B14F-4D97-AF65-F5344CB8AC3E}">
-        <p14:creationId xmlns:p14="http://schemas.microsoft.com/office/powerpoint/2010/main" val="1947285826"/>
+        <p14:creationId xmlns:p14="http://schemas.microsoft.com/office/powerpoint/2010/main" val="3981548123"/>
       </p:ext>
     </p:extLst>
   </p:cSld>
@@ -5806,10 +6032,65 @@
   <p:cSld>
     <p:spTree>
       <p:nvGrpSpPr>
+        <p:cNvPr id="1" name=""/>
+        <p:cNvGrpSpPr/>
+        <p:nvPr/>
+      </p:nvGrpSpPr>
+      <p:grpSpPr>
+        <a:xfrm>
+          <a:off x="0" y="0"/>
+          <a:ext cx="0" cy="0"/>
+          <a:chOff x="0" y="0"/>
+          <a:chExt cx="0" cy="0"/>
+        </a:xfrm>
+      </p:grpSpPr>
+      <p:sp>
+        <p:nvSpPr>
+          <p:cNvPr id="4" name="Title 3">
+            <a:extLst>
+              <a:ext uri="{FF2B5EF4-FFF2-40B4-BE49-F238E27FC236}">
+                <a16:creationId xmlns:a16="http://schemas.microsoft.com/office/drawing/2014/main" id="{27831C99-7466-5707-AAF8-25B3E4A5A8CE}"/>
+              </a:ext>
+            </a:extLst>
+          </p:cNvPr>
+          <p:cNvSpPr>
+            <a:spLocks noGrp="1"/>
+          </p:cNvSpPr>
+          <p:nvPr>
+            <p:ph type="title"/>
+          </p:nvPr>
+        </p:nvSpPr>
+        <p:spPr/>
+        <p:txBody>
+          <a:bodyPr/>
+          <a:lstStyle/>
+          <a:p>
+            <a:endParaRPr lang="en-US"/>
+          </a:p>
+        </p:txBody>
+      </p:sp>
+    </p:spTree>
+    <p:extLst>
+      <p:ext uri="{BB962C8B-B14F-4D97-AF65-F5344CB8AC3E}">
+        <p14:creationId xmlns:p14="http://schemas.microsoft.com/office/powerpoint/2010/main" val="2977772304"/>
+      </p:ext>
+    </p:extLst>
+  </p:cSld>
+  <p:clrMapOvr>
+    <a:masterClrMapping/>
+  </p:clrMapOvr>
+</p:sld>
+</file>
+
+<file path=ppt/slides/slide2.xml><?xml version="1.0" encoding="utf-8"?>
+<p:sld xmlns:a="http://schemas.openxmlformats.org/drawingml/2006/main" xmlns:r="http://schemas.openxmlformats.org/officeDocument/2006/relationships" xmlns:p="http://schemas.openxmlformats.org/presentationml/2006/main">
+  <p:cSld>
+    <p:spTree>
+      <p:nvGrpSpPr>
         <p:cNvPr id="1" name="">
           <a:extLst>
             <a:ext uri="{FF2B5EF4-FFF2-40B4-BE49-F238E27FC236}">
-              <a16:creationId xmlns:a16="http://schemas.microsoft.com/office/drawing/2014/main" id="{BED45E38-C88E-2068-F77D-95E980427400}"/>
+              <a16:creationId xmlns:a16="http://schemas.microsoft.com/office/drawing/2014/main" id="{C5274ACA-D1E7-477C-BD53-700D1FC49F74}"/>
             </a:ext>
           </a:extLst>
         </p:cNvPr>
@@ -5829,7 +6110,7 @@
           <p:cNvPr id="7" name="Title 6">
             <a:extLst>
               <a:ext uri="{FF2B5EF4-FFF2-40B4-BE49-F238E27FC236}">
-                <a16:creationId xmlns:a16="http://schemas.microsoft.com/office/drawing/2014/main" id="{C2EB76B4-DDBB-DA95-A95A-3F72AB191D32}"/>
+                <a16:creationId xmlns:a16="http://schemas.microsoft.com/office/drawing/2014/main" id="{2A3714F6-3778-2425-75FC-816C824A1831}"/>
               </a:ext>
             </a:extLst>
           </p:cNvPr>
@@ -5845,7 +6126,10 @@
           <a:bodyPr/>
           <a:lstStyle/>
           <a:p>
-            <a:endParaRPr lang="en-US" dirty="0"/>
+            <a:r>
+              <a:rPr lang="en-US" dirty="0"/>
+              <a:t>Overall Protein Heatmap</a:t>
+            </a:r>
           </a:p>
         </p:txBody>
       </p:sp>
@@ -5854,7 +6138,7 @@
           <p:cNvPr id="4" name="Text Placeholder 3">
             <a:extLst>
               <a:ext uri="{FF2B5EF4-FFF2-40B4-BE49-F238E27FC236}">
-                <a16:creationId xmlns:a16="http://schemas.microsoft.com/office/drawing/2014/main" id="{1A3D6BEE-422F-5BFF-D1E7-2E2EF88DBCBE}"/>
+                <a16:creationId xmlns:a16="http://schemas.microsoft.com/office/drawing/2014/main" id="{9E705311-D96C-653D-B495-FB05B7E9D913}"/>
               </a:ext>
             </a:extLst>
           </p:cNvPr>
@@ -5876,38 +6160,136 @@
       </p:sp>
       <p:sp>
         <p:nvSpPr>
-          <p:cNvPr id="2" name="Content Placeholder 2">
-            <a:extLst>
-              <a:ext uri="{FF2B5EF4-FFF2-40B4-BE49-F238E27FC236}">
-                <a16:creationId xmlns:a16="http://schemas.microsoft.com/office/drawing/2014/main" id="{4A3ED5B7-0D5A-3718-0ABD-9297F03249C1}"/>
-              </a:ext>
-            </a:extLst>
-          </p:cNvPr>
-          <p:cNvSpPr>
-            <a:spLocks noGrp="1"/>
-          </p:cNvSpPr>
-          <p:nvPr>
-            <p:ph sz="quarter" idx="13"/>
-          </p:nvPr>
-        </p:nvSpPr>
-        <p:spPr>
-          <a:xfrm>
-            <a:off x="457200" y="1594034"/>
-            <a:ext cx="10896600" cy="4636497"/>
-          </a:xfrm>
-        </p:spPr>
-        <p:txBody>
-          <a:bodyPr/>
-          <a:lstStyle/>
-          <a:p>
-            <a:endParaRPr lang="en-US" dirty="0"/>
-          </a:p>
-        </p:txBody>
-      </p:sp>
+          <p:cNvPr id="6" name="Rectangle 5">
+            <a:extLst>
+              <a:ext uri="{FF2B5EF4-FFF2-40B4-BE49-F238E27FC236}">
+                <a16:creationId xmlns:a16="http://schemas.microsoft.com/office/drawing/2014/main" id="{1E42B409-1ABD-7FAA-9FA2-5CADAB47A34C}"/>
+              </a:ext>
+            </a:extLst>
+          </p:cNvPr>
+          <p:cNvSpPr/>
+          <p:nvPr/>
+        </p:nvSpPr>
+        <p:spPr>
+          <a:xfrm rot="16200000">
+            <a:off x="206520" y="2432746"/>
+            <a:ext cx="1165464" cy="377505"/>
+          </a:xfrm>
+          <a:prstGeom prst="rect">
+            <a:avLst/>
+          </a:prstGeom>
+        </p:spPr>
+        <p:style>
+          <a:lnRef idx="2">
+            <a:schemeClr val="accent1">
+              <a:shade val="15000"/>
+            </a:schemeClr>
+          </a:lnRef>
+          <a:fillRef idx="1">
+            <a:schemeClr val="accent1"/>
+          </a:fillRef>
+          <a:effectRef idx="0">
+            <a:schemeClr val="accent1"/>
+          </a:effectRef>
+          <a:fontRef idx="minor">
+            <a:schemeClr val="lt1"/>
+          </a:fontRef>
+        </p:style>
+        <p:txBody>
+          <a:bodyPr rtlCol="0" anchor="ctr"/>
+          <a:lstStyle/>
+          <a:p>
+            <a:pPr algn="ctr"/>
+            <a:r>
+              <a:rPr lang="en-US" sz="1600" dirty="0"/>
+              <a:t>Responder</a:t>
+            </a:r>
+          </a:p>
+        </p:txBody>
+      </p:sp>
+      <p:sp>
+        <p:nvSpPr>
+          <p:cNvPr id="8" name="Rectangle 7">
+            <a:extLst>
+              <a:ext uri="{FF2B5EF4-FFF2-40B4-BE49-F238E27FC236}">
+                <a16:creationId xmlns:a16="http://schemas.microsoft.com/office/drawing/2014/main" id="{64263655-77C9-7E13-F3A3-85C512C00CC1}"/>
+              </a:ext>
+            </a:extLst>
+          </p:cNvPr>
+          <p:cNvSpPr/>
+          <p:nvPr/>
+        </p:nvSpPr>
+        <p:spPr>
+          <a:xfrm rot="16200000">
+            <a:off x="116809" y="4171902"/>
+            <a:ext cx="1359284" cy="377505"/>
+          </a:xfrm>
+          <a:prstGeom prst="rect">
+            <a:avLst/>
+          </a:prstGeom>
+        </p:spPr>
+        <p:style>
+          <a:lnRef idx="2">
+            <a:schemeClr val="accent1">
+              <a:shade val="15000"/>
+            </a:schemeClr>
+          </a:lnRef>
+          <a:fillRef idx="1">
+            <a:schemeClr val="accent1"/>
+          </a:fillRef>
+          <a:effectRef idx="0">
+            <a:schemeClr val="accent1"/>
+          </a:effectRef>
+          <a:fontRef idx="minor">
+            <a:schemeClr val="lt1"/>
+          </a:fontRef>
+        </p:style>
+        <p:txBody>
+          <a:bodyPr rtlCol="0" anchor="ctr"/>
+          <a:lstStyle/>
+          <a:p>
+            <a:pPr algn="ctr"/>
+            <a:r>
+              <a:rPr lang="en-US" sz="1400" dirty="0"/>
+              <a:t>Non-Responder</a:t>
+            </a:r>
+          </a:p>
+        </p:txBody>
+      </p:sp>
+      <p:pic>
+        <p:nvPicPr>
+          <p:cNvPr id="10" name="Picture 9">
+            <a:extLst>
+              <a:ext uri="{FF2B5EF4-FFF2-40B4-BE49-F238E27FC236}">
+                <a16:creationId xmlns:a16="http://schemas.microsoft.com/office/drawing/2014/main" id="{05D5DC38-014A-370C-F818-E75C2F434D68}"/>
+              </a:ext>
+            </a:extLst>
+          </p:cNvPr>
+          <p:cNvPicPr>
+            <a:picLocks noChangeAspect="1"/>
+          </p:cNvPicPr>
+          <p:nvPr/>
+        </p:nvPicPr>
+        <p:blipFill>
+          <a:blip r:embed="rId3"/>
+          <a:stretch>
+            <a:fillRect/>
+          </a:stretch>
+        </p:blipFill>
+        <p:spPr>
+          <a:xfrm>
+            <a:off x="1219200" y="1929905"/>
+            <a:ext cx="10134600" cy="3447727"/>
+          </a:xfrm>
+          <a:prstGeom prst="rect">
+            <a:avLst/>
+          </a:prstGeom>
+        </p:spPr>
+      </p:pic>
     </p:spTree>
     <p:extLst>
       <p:ext uri="{BB962C8B-B14F-4D97-AF65-F5344CB8AC3E}">
-        <p14:creationId xmlns:p14="http://schemas.microsoft.com/office/powerpoint/2010/main" val="1813329216"/>
+        <p14:creationId xmlns:p14="http://schemas.microsoft.com/office/powerpoint/2010/main" val="599975470"/>
       </p:ext>
     </p:extLst>
   </p:cSld>
@@ -5917,7 +6299,7 @@
 </p:sld>
 </file>
 
-<file path=ppt/slides/slide2.xml><?xml version="1.0" encoding="utf-8"?>
+<file path=ppt/slides/slide3.xml><?xml version="1.0" encoding="utf-8"?>
 <p:sld xmlns:a="http://schemas.openxmlformats.org/drawingml/2006/main" xmlns:r="http://schemas.openxmlformats.org/officeDocument/2006/relationships" xmlns:p="http://schemas.openxmlformats.org/presentationml/2006/main">
   <p:cSld>
     <p:spTree>
@@ -6075,7 +6457,7 @@
 </p:sld>
 </file>
 
-<file path=ppt/slides/slide3.xml><?xml version="1.0" encoding="utf-8"?>
+<file path=ppt/slides/slide4.xml><?xml version="1.0" encoding="utf-8"?>
 <p:sld xmlns:a="http://schemas.openxmlformats.org/drawingml/2006/main" xmlns:r="http://schemas.openxmlformats.org/officeDocument/2006/relationships" xmlns:p="http://schemas.openxmlformats.org/presentationml/2006/main">
   <p:cSld>
     <p:spTree>
@@ -6233,7 +6615,7 @@
 </p:sld>
 </file>
 
-<file path=ppt/slides/slide4.xml><?xml version="1.0" encoding="utf-8"?>
+<file path=ppt/slides/slide5.xml><?xml version="1.0" encoding="utf-8"?>
 <p:sld xmlns:a="http://schemas.openxmlformats.org/drawingml/2006/main" xmlns:r="http://schemas.openxmlformats.org/officeDocument/2006/relationships" xmlns:p="http://schemas.openxmlformats.org/presentationml/2006/main">
   <p:cSld>
     <p:spTree>
@@ -6455,7 +6837,7 @@
 </p:sld>
 </file>
 
-<file path=ppt/slides/slide5.xml><?xml version="1.0" encoding="utf-8"?>
+<file path=ppt/slides/slide6.xml><?xml version="1.0" encoding="utf-8"?>
 <p:sld xmlns:a="http://schemas.openxmlformats.org/drawingml/2006/main" xmlns:r="http://schemas.openxmlformats.org/officeDocument/2006/relationships" xmlns:p="http://schemas.openxmlformats.org/presentationml/2006/main">
   <p:cSld>
     <p:spTree>
@@ -6607,7 +6989,7 @@
 </p:sld>
 </file>
 
-<file path=ppt/slides/slide6.xml><?xml version="1.0" encoding="utf-8"?>
+<file path=ppt/slides/slide7.xml><?xml version="1.0" encoding="utf-8"?>
 <p:sld xmlns:a="http://schemas.openxmlformats.org/drawingml/2006/main" xmlns:r="http://schemas.openxmlformats.org/officeDocument/2006/relationships" xmlns:p="http://schemas.openxmlformats.org/presentationml/2006/main">
   <p:cSld>
     <p:spTree>
@@ -6801,6 +7183,58 @@
           </a:prstGeom>
         </p:spPr>
       </p:pic>
+      <p:sp>
+        <p:nvSpPr>
+          <p:cNvPr id="3" name="Rectangle 2">
+            <a:extLst>
+              <a:ext uri="{FF2B5EF4-FFF2-40B4-BE49-F238E27FC236}">
+                <a16:creationId xmlns:a16="http://schemas.microsoft.com/office/drawing/2014/main" id="{5EED3178-0529-443C-0E54-5EBE8CEFB4E3}"/>
+              </a:ext>
+            </a:extLst>
+          </p:cNvPr>
+          <p:cNvSpPr/>
+          <p:nvPr/>
+        </p:nvSpPr>
+        <p:spPr>
+          <a:xfrm>
+            <a:off x="878930" y="1622120"/>
+            <a:ext cx="4249662" cy="751561"/>
+          </a:xfrm>
+          <a:prstGeom prst="rect">
+            <a:avLst/>
+          </a:prstGeom>
+          <a:noFill/>
+          <a:ln w="19050">
+            <a:solidFill>
+              <a:srgbClr val="EE0000"/>
+            </a:solidFill>
+          </a:ln>
+        </p:spPr>
+        <p:style>
+          <a:lnRef idx="2">
+            <a:schemeClr val="accent1">
+              <a:shade val="15000"/>
+            </a:schemeClr>
+          </a:lnRef>
+          <a:fillRef idx="1">
+            <a:schemeClr val="accent1"/>
+          </a:fillRef>
+          <a:effectRef idx="0">
+            <a:schemeClr val="accent1"/>
+          </a:effectRef>
+          <a:fontRef idx="minor">
+            <a:schemeClr val="lt1"/>
+          </a:fontRef>
+        </p:style>
+        <p:txBody>
+          <a:bodyPr rtlCol="0" anchor="ctr"/>
+          <a:lstStyle/>
+          <a:p>
+            <a:pPr algn="ctr"/>
+            <a:endParaRPr lang="en-US"/>
+          </a:p>
+        </p:txBody>
+      </p:sp>
     </p:spTree>
     <p:extLst>
       <p:ext uri="{BB962C8B-B14F-4D97-AF65-F5344CB8AC3E}">
@@ -6814,7 +7248,7 @@
 </p:sld>
 </file>
 
-<file path=ppt/slides/slide7.xml><?xml version="1.0" encoding="utf-8"?>
+<file path=ppt/slides/slide8.xml><?xml version="1.0" encoding="utf-8"?>
 <p:sld xmlns:a="http://schemas.openxmlformats.org/drawingml/2006/main" xmlns:r="http://schemas.openxmlformats.org/officeDocument/2006/relationships" xmlns:p="http://schemas.openxmlformats.org/presentationml/2006/main">
   <p:cSld>
     <p:spTree>
@@ -6966,7 +7400,7 @@
 </p:sld>
 </file>
 
-<file path=ppt/slides/slide8.xml><?xml version="1.0" encoding="utf-8"?>
+<file path=ppt/slides/slide9.xml><?xml version="1.0" encoding="utf-8"?>
 <p:sld xmlns:a="http://schemas.openxmlformats.org/drawingml/2006/main" xmlns:r="http://schemas.openxmlformats.org/officeDocument/2006/relationships" xmlns:p="http://schemas.openxmlformats.org/presentationml/2006/main">
   <p:cSld>
     <p:spTree>
@@ -7209,182 +7643,6 @@
     <p:extLst>
       <p:ext uri="{BB962C8B-B14F-4D97-AF65-F5344CB8AC3E}">
         <p14:creationId xmlns:p14="http://schemas.microsoft.com/office/powerpoint/2010/main" val="465536241"/>
-      </p:ext>
-    </p:extLst>
-  </p:cSld>
-  <p:clrMapOvr>
-    <a:masterClrMapping/>
-  </p:clrMapOvr>
-</p:sld>
-</file>
-
-<file path=ppt/slides/slide9.xml><?xml version="1.0" encoding="utf-8"?>
-<p:sld xmlns:a="http://schemas.openxmlformats.org/drawingml/2006/main" xmlns:r="http://schemas.openxmlformats.org/officeDocument/2006/relationships" xmlns:p="http://schemas.openxmlformats.org/presentationml/2006/main">
-  <p:cSld>
-    <p:spTree>
-      <p:nvGrpSpPr>
-        <p:cNvPr id="1" name="">
-          <a:extLst>
-            <a:ext uri="{FF2B5EF4-FFF2-40B4-BE49-F238E27FC236}">
-              <a16:creationId xmlns:a16="http://schemas.microsoft.com/office/drawing/2014/main" id="{1A4EB970-AB51-855E-AEB1-DA57EAA32C74}"/>
-            </a:ext>
-          </a:extLst>
-        </p:cNvPr>
-        <p:cNvGrpSpPr/>
-        <p:nvPr/>
-      </p:nvGrpSpPr>
-      <p:grpSpPr>
-        <a:xfrm>
-          <a:off x="0" y="0"/>
-          <a:ext cx="0" cy="0"/>
-          <a:chOff x="0" y="0"/>
-          <a:chExt cx="0" cy="0"/>
-        </a:xfrm>
-      </p:grpSpPr>
-      <p:sp>
-        <p:nvSpPr>
-          <p:cNvPr id="7" name="Title 6">
-            <a:extLst>
-              <a:ext uri="{FF2B5EF4-FFF2-40B4-BE49-F238E27FC236}">
-                <a16:creationId xmlns:a16="http://schemas.microsoft.com/office/drawing/2014/main" id="{FC235DAD-95F8-F669-C197-C08575AFC268}"/>
-              </a:ext>
-            </a:extLst>
-          </p:cNvPr>
-          <p:cNvSpPr>
-            <a:spLocks noGrp="1"/>
-          </p:cNvSpPr>
-          <p:nvPr>
-            <p:ph type="title"/>
-          </p:nvPr>
-        </p:nvSpPr>
-        <p:spPr>
-          <a:xfrm>
-            <a:off x="457200" y="702134"/>
-            <a:ext cx="10896600" cy="517065"/>
-          </a:xfrm>
-        </p:spPr>
-        <p:txBody>
-          <a:bodyPr wrap="square" anchor="b">
-            <a:normAutofit/>
-          </a:bodyPr>
-          <a:lstStyle/>
-          <a:p>
-            <a:r>
-              <a:rPr lang="en-US" dirty="0"/>
-              <a:t>Statistical Significance CD8 Gene Expression – R vs NR</a:t>
-            </a:r>
-          </a:p>
-        </p:txBody>
-      </p:sp>
-      <p:sp>
-        <p:nvSpPr>
-          <p:cNvPr id="12" name="Text Placeholder 3">
-            <a:extLst>
-              <a:ext uri="{FF2B5EF4-FFF2-40B4-BE49-F238E27FC236}">
-                <a16:creationId xmlns:a16="http://schemas.microsoft.com/office/drawing/2014/main" id="{B5443D08-AC6B-9E2D-ED3C-2CE83A0E00E6}"/>
-              </a:ext>
-            </a:extLst>
-          </p:cNvPr>
-          <p:cNvSpPr>
-            <a:spLocks noGrp="1"/>
-          </p:cNvSpPr>
-          <p:nvPr>
-            <p:ph type="body" sz="quarter" idx="14"/>
-          </p:nvPr>
-        </p:nvSpPr>
-        <p:spPr>
-          <a:xfrm>
-            <a:off x="0" y="6534055"/>
-            <a:ext cx="4460516" cy="323165"/>
-          </a:xfrm>
-        </p:spPr>
-        <p:txBody>
-          <a:bodyPr/>
-          <a:lstStyle/>
-          <a:p>
-            <a:endParaRPr lang="en-US"/>
-          </a:p>
-        </p:txBody>
-      </p:sp>
-      <p:sp>
-        <p:nvSpPr>
-          <p:cNvPr id="14" name="Content Placeholder 4">
-            <a:extLst>
-              <a:ext uri="{FF2B5EF4-FFF2-40B4-BE49-F238E27FC236}">
-                <a16:creationId xmlns:a16="http://schemas.microsoft.com/office/drawing/2014/main" id="{FFF3E895-CB6B-4EFA-C0F7-6ECF75B131C1}"/>
-              </a:ext>
-            </a:extLst>
-          </p:cNvPr>
-          <p:cNvSpPr>
-            <a:spLocks noGrp="1"/>
-          </p:cNvSpPr>
-          <p:nvPr>
-            <p:ph sz="quarter" idx="15"/>
-          </p:nvPr>
-        </p:nvSpPr>
-        <p:spPr>
-          <a:xfrm>
-            <a:off x="5621035" y="1805612"/>
-            <a:ext cx="4431287" cy="1789208"/>
-          </a:xfrm>
-        </p:spPr>
-        <p:txBody>
-          <a:bodyPr/>
-          <a:lstStyle/>
-          <a:p>
-            <a:r>
-              <a:rPr lang="en-US" dirty="0"/>
-              <a:t>Param: 0.5% CD8 threshold</a:t>
-            </a:r>
-          </a:p>
-          <a:p>
-            <a:r>
-              <a:rPr lang="en-US" dirty="0"/>
-              <a:t>Each sample CD8 expression averaged</a:t>
-            </a:r>
-          </a:p>
-          <a:p>
-            <a:r>
-              <a:rPr lang="en-US" dirty="0"/>
-              <a:t>No notable differences</a:t>
-            </a:r>
-          </a:p>
-        </p:txBody>
-      </p:sp>
-      <p:pic>
-        <p:nvPicPr>
-          <p:cNvPr id="6" name="Picture 5">
-            <a:extLst>
-              <a:ext uri="{FF2B5EF4-FFF2-40B4-BE49-F238E27FC236}">
-                <a16:creationId xmlns:a16="http://schemas.microsoft.com/office/drawing/2014/main" id="{09F86524-9CA5-AA3E-BDBB-729F456CED38}"/>
-              </a:ext>
-            </a:extLst>
-          </p:cNvPr>
-          <p:cNvPicPr>
-            <a:picLocks noChangeAspect="1"/>
-          </p:cNvPicPr>
-          <p:nvPr/>
-        </p:nvPicPr>
-        <p:blipFill>
-          <a:blip r:embed="rId3"/>
-          <a:stretch>
-            <a:fillRect/>
-          </a:stretch>
-        </p:blipFill>
-        <p:spPr>
-          <a:xfrm>
-            <a:off x="715174" y="1621721"/>
-            <a:ext cx="4460516" cy="4349558"/>
-          </a:xfrm>
-          <a:prstGeom prst="rect">
-            <a:avLst/>
-          </a:prstGeom>
-        </p:spPr>
-      </p:pic>
-    </p:spTree>
-    <p:extLst>
-      <p:ext uri="{BB962C8B-B14F-4D97-AF65-F5344CB8AC3E}">
-        <p14:creationId xmlns:p14="http://schemas.microsoft.com/office/powerpoint/2010/main" val="2790761111"/>
       </p:ext>
     </p:extLst>
   </p:cSld>
